--- a/ppt/X25167936_warehouse-robotics-fleet.pptx
+++ b/ppt/X25167936_warehouse-robotics-fleet.pptx
@@ -3095,55 +3095,20 @@
       <p:grpSpPr/>
       <p:sp>
         <p:nvSpPr>
-          <p:cNvPr id="2" name="TextBox 1"/>
-          <p:cNvSpPr txBox="1"/>
-          <p:nvPr/>
-        </p:nvSpPr>
-        <p:spPr>
-          <a:xfrm>
-            <a:off x="731520" y="2286000"/>
-            <a:ext cx="10698480" cy="1371600"/>
-          </a:xfrm>
-          <a:prstGeom prst="rect">
-            <a:avLst/>
-          </a:prstGeom>
-          <a:noFill/>
-        </p:spPr>
-        <p:txBody>
-          <a:bodyPr wrap="square" anchor="t">
-            <a:spAutoFit/>
-          </a:bodyPr>
-          <a:lstStyle/>
-          <a:p>
-            <a:pPr algn="ctr"/>
-            <a:r>
-              <a:rPr sz="3100" b="1">
-                <a:solidFill>
-                  <a:srgbClr val="B5622A"/>
-                </a:solidFill>
-                <a:latin typeface="Century Gothic"/>
-              </a:rPr>
-              <a:t>Warehouse Robotics Fleet Monitoring</a:t>
-            </a:r>
-          </a:p>
-        </p:txBody>
-      </p:sp>
-      <p:sp>
-        <p:nvSpPr>
-          <p:cNvPr id="3" name="Rectangle 2"/>
+          <p:cNvPr id="2" name="Rectangle 1"/>
           <p:cNvSpPr/>
           <p:nvPr/>
         </p:nvSpPr>
         <p:spPr>
           <a:xfrm>
-            <a:off x="4727448" y="3657600"/>
-            <a:ext cx="2743200" cy="45720"/>
+            <a:off x="-91440" y="-91440"/>
+            <a:ext cx="12435840" cy="7132320"/>
           </a:xfrm>
           <a:prstGeom prst="rect">
             <a:avLst/>
           </a:prstGeom>
           <a:solidFill>
-            <a:srgbClr val="B5622A"/>
+            <a:srgbClr val="FFFFFF"/>
           </a:solidFill>
           <a:ln>
             <a:noFill/>
@@ -3174,14 +3139,102 @@
       </p:sp>
       <p:sp>
         <p:nvSpPr>
-          <p:cNvPr id="4" name="TextBox 3"/>
+          <p:cNvPr id="3" name="Rectangle 2"/>
+          <p:cNvSpPr/>
+          <p:nvPr/>
+        </p:nvSpPr>
+        <p:spPr>
+          <a:xfrm>
+            <a:off x="-91440" y="-91440"/>
+            <a:ext cx="12435840" cy="4160520"/>
+          </a:xfrm>
+          <a:prstGeom prst="rect">
+            <a:avLst/>
+          </a:prstGeom>
+          <a:solidFill>
+            <a:srgbClr val="B5622A"/>
+          </a:solidFill>
+          <a:ln>
+            <a:noFill/>
+          </a:ln>
+          <a:effectLst/>
+        </p:spPr>
+        <p:style>
+          <a:lnRef idx="1">
+            <a:schemeClr val="accent1"/>
+          </a:lnRef>
+          <a:fillRef idx="3">
+            <a:schemeClr val="accent1"/>
+          </a:fillRef>
+          <a:effectRef idx="2">
+            <a:schemeClr val="accent1"/>
+          </a:effectRef>
+          <a:fontRef idx="minor">
+            <a:schemeClr val="lt1"/>
+          </a:fontRef>
+        </p:style>
+        <p:txBody>
+          <a:bodyPr rtlCol="0" anchor="ctr"/>
+          <a:lstStyle/>
+          <a:p>
+            <a:pPr algn="ctr"/>
+          </a:p>
+        </p:txBody>
+      </p:sp>
+      <p:sp>
+        <p:nvSpPr>
+          <p:cNvPr id="4" name="Oval 3"/>
+          <p:cNvSpPr/>
+          <p:nvPr/>
+        </p:nvSpPr>
+        <p:spPr>
+          <a:xfrm>
+            <a:off x="5570524" y="525780"/>
+            <a:ext cx="1051560" cy="1051560"/>
+          </a:xfrm>
+          <a:prstGeom prst="ellipse">
+            <a:avLst/>
+          </a:prstGeom>
+          <a:solidFill>
+            <a:srgbClr val="FFFFFF"/>
+          </a:solidFill>
+          <a:ln>
+            <a:noFill/>
+          </a:ln>
+          <a:effectLst/>
+        </p:spPr>
+        <p:style>
+          <a:lnRef idx="1">
+            <a:schemeClr val="accent1"/>
+          </a:lnRef>
+          <a:fillRef idx="3">
+            <a:schemeClr val="accent1"/>
+          </a:fillRef>
+          <a:effectRef idx="2">
+            <a:schemeClr val="accent1"/>
+          </a:effectRef>
+          <a:fontRef idx="minor">
+            <a:schemeClr val="lt1"/>
+          </a:fontRef>
+        </p:style>
+        <p:txBody>
+          <a:bodyPr rtlCol="0" anchor="ctr"/>
+          <a:lstStyle/>
+          <a:p>
+            <a:pPr algn="ctr"/>
+          </a:p>
+        </p:txBody>
+      </p:sp>
+      <p:sp>
+        <p:nvSpPr>
+          <p:cNvPr id="5" name="TextBox 4"/>
           <p:cNvSpPr txBox="1"/>
           <p:nvPr/>
         </p:nvSpPr>
         <p:spPr>
           <a:xfrm>
-            <a:off x="731520" y="3886200"/>
-            <a:ext cx="10698480" cy="2011680"/>
+            <a:off x="5570524" y="525780"/>
+            <a:ext cx="1051560" cy="1051560"/>
           </a:xfrm>
           <a:prstGeom prst="rect">
             <a:avLst/>
@@ -3189,6 +3242,76 @@
           <a:noFill/>
         </p:spPr>
         <p:txBody>
+          <a:bodyPr wrap="none" anchor="ctr">
+            <a:spAutoFit/>
+          </a:bodyPr>
+          <a:lstStyle/>
+          <a:p>
+            <a:pPr algn="ctr"/>
+            <a:r>
+              <a:rPr sz="3400" b="1">
+                <a:solidFill>
+                  <a:srgbClr val="B5622A"/>
+                </a:solidFill>
+                <a:latin typeface="Century Gothic"/>
+              </a:rPr>
+              <a:t>WR</a:t>
+            </a:r>
+          </a:p>
+        </p:txBody>
+      </p:sp>
+      <p:sp>
+        <p:nvSpPr>
+          <p:cNvPr id="6" name="TextBox 5"/>
+          <p:cNvSpPr txBox="1"/>
+          <p:nvPr/>
+        </p:nvSpPr>
+        <p:spPr>
+          <a:xfrm>
+            <a:off x="914400" y="1874519"/>
+            <a:ext cx="10332720" cy="1554480"/>
+          </a:xfrm>
+          <a:prstGeom prst="rect">
+            <a:avLst/>
+          </a:prstGeom>
+          <a:noFill/>
+        </p:spPr>
+        <p:txBody>
+          <a:bodyPr wrap="square" anchor="ctr">
+            <a:spAutoFit/>
+          </a:bodyPr>
+          <a:lstStyle/>
+          <a:p>
+            <a:pPr algn="ctr"/>
+            <a:r>
+              <a:rPr sz="3400" b="1" i="0">
+                <a:solidFill>
+                  <a:srgbClr val="FFFFFF"/>
+                </a:solidFill>
+                <a:latin typeface="Century Gothic"/>
+              </a:rPr>
+              <a:t>Warehouse Robotics Fleet Monitoring</a:t>
+            </a:r>
+          </a:p>
+        </p:txBody>
+      </p:sp>
+      <p:sp>
+        <p:nvSpPr>
+          <p:cNvPr id="7" name="TextBox 6"/>
+          <p:cNvSpPr txBox="1"/>
+          <p:nvPr/>
+        </p:nvSpPr>
+        <p:spPr>
+          <a:xfrm>
+            <a:off x="1371600" y="4434840"/>
+            <a:ext cx="9418320" cy="548640"/>
+          </a:xfrm>
+          <a:prstGeom prst="rect">
+            <a:avLst/>
+          </a:prstGeom>
+          <a:noFill/>
+        </p:spPr>
+        <p:txBody>
           <a:bodyPr wrap="square" anchor="t">
             <a:spAutoFit/>
           </a:bodyPr>
@@ -3196,33 +3319,68 @@
           <a:p>
             <a:pPr algn="ctr"/>
             <a:r>
-              <a:rPr sz="1800" b="0">
-                <a:solidFill>
-                  <a:srgbClr val="5C655F"/>
+              <a:rPr sz="1800" b="0" i="1">
+                <a:solidFill>
+                  <a:srgbClr val="995323"/>
                 </a:solidFill>
                 <a:latin typeface="Calibri"/>
               </a:rPr>
               <a:t>A fog-to-cloud pipeline for live robot health monitoring</a:t>
             </a:r>
           </a:p>
+        </p:txBody>
+      </p:sp>
+      <p:sp>
+        <p:nvSpPr>
+          <p:cNvPr id="8" name="TextBox 7"/>
+          <p:cNvSpPr txBox="1"/>
+          <p:nvPr/>
+        </p:nvSpPr>
+        <p:spPr>
+          <a:xfrm>
+            <a:off x="1371600" y="5212080"/>
+            <a:ext cx="9418320" cy="1371600"/>
+          </a:xfrm>
+          <a:prstGeom prst="rect">
+            <a:avLst/>
+          </a:prstGeom>
+          <a:noFill/>
+        </p:spPr>
+        <p:txBody>
+          <a:bodyPr wrap="square" anchor="t">
+            <a:spAutoFit/>
+          </a:bodyPr>
+          <a:lstStyle/>
           <a:p>
             <a:pPr algn="ctr"/>
             <a:r>
-              <a:rPr sz="1600" b="1">
-                <a:solidFill>
-                  <a:srgbClr val="232A26"/>
+              <a:rPr sz="1700" b="1" i="0">
+                <a:solidFill>
+                  <a:srgbClr val="262B2E"/>
                 </a:solidFill>
                 <a:latin typeface="Calibri"/>
               </a:rPr>
-              <a:t>Goutham Uppu    Student ID X25167936</a:t>
+              <a:t>Goutham Uppu</a:t>
             </a:r>
           </a:p>
           <a:p>
             <a:pPr algn="ctr"/>
             <a:r>
-              <a:rPr sz="1300" b="0">
-                <a:solidFill>
-                  <a:srgbClr val="5C655F"/>
+              <a:rPr sz="1300" b="0" i="0">
+                <a:solidFill>
+                  <a:srgbClr val="5A635C"/>
+                </a:solidFill>
+                <a:latin typeface="Calibri"/>
+              </a:rPr>
+              <a:t>Student ID X25167936</a:t>
+            </a:r>
+          </a:p>
+          <a:p>
+            <a:pPr algn="ctr"/>
+            <a:r>
+              <a:rPr sz="1250" b="0" i="0">
+                <a:solidFill>
+                  <a:srgbClr val="5A635C"/>
                 </a:solidFill>
                 <a:latin typeface="Calibri"/>
               </a:rPr>
@@ -3232,9 +3390,9 @@
           <a:p>
             <a:pPr algn="ctr"/>
             <a:r>
-              <a:rPr sz="1300" b="0">
-                <a:solidFill>
-                  <a:srgbClr val="5C655F"/>
+              <a:rPr sz="1250" b="0" i="0">
+                <a:solidFill>
+                  <a:srgbClr val="5A635C"/>
                 </a:solidFill>
                 <a:latin typeface="Calibri"/>
               </a:rPr>

--- a/ppt/X25167936_warehouse-robotics-fleet.pptx
+++ b/ppt/X25167936_warehouse-robotics-fleet.pptx
@@ -3183,58 +3183,14 @@
       </p:sp>
       <p:sp>
         <p:nvSpPr>
-          <p:cNvPr id="4" name="Oval 3"/>
-          <p:cNvSpPr/>
+          <p:cNvPr id="4" name="TextBox 3"/>
+          <p:cNvSpPr txBox="1"/>
           <p:nvPr/>
         </p:nvSpPr>
         <p:spPr>
           <a:xfrm>
-            <a:off x="5570524" y="525780"/>
-            <a:ext cx="1051560" cy="1051560"/>
-          </a:xfrm>
-          <a:prstGeom prst="ellipse">
-            <a:avLst/>
-          </a:prstGeom>
-          <a:solidFill>
-            <a:srgbClr val="FFFFFF"/>
-          </a:solidFill>
-          <a:ln>
-            <a:noFill/>
-          </a:ln>
-          <a:effectLst/>
-        </p:spPr>
-        <p:style>
-          <a:lnRef idx="1">
-            <a:schemeClr val="accent1"/>
-          </a:lnRef>
-          <a:fillRef idx="3">
-            <a:schemeClr val="accent1"/>
-          </a:fillRef>
-          <a:effectRef idx="2">
-            <a:schemeClr val="accent1"/>
-          </a:effectRef>
-          <a:fontRef idx="minor">
-            <a:schemeClr val="lt1"/>
-          </a:fontRef>
-        </p:style>
-        <p:txBody>
-          <a:bodyPr rtlCol="0" anchor="ctr"/>
-          <a:lstStyle/>
-          <a:p>
-            <a:pPr algn="ctr"/>
-          </a:p>
-        </p:txBody>
-      </p:sp>
-      <p:sp>
-        <p:nvSpPr>
-          <p:cNvPr id="5" name="TextBox 4"/>
-          <p:cNvSpPr txBox="1"/>
-          <p:nvPr/>
-        </p:nvSpPr>
-        <p:spPr>
-          <a:xfrm>
-            <a:off x="5570524" y="525780"/>
-            <a:ext cx="1051560" cy="1051560"/>
+            <a:off x="914400" y="1143000"/>
+            <a:ext cx="10332720" cy="1965960"/>
           </a:xfrm>
           <a:prstGeom prst="rect">
             <a:avLst/>
@@ -3242,41 +3198,6 @@
           <a:noFill/>
         </p:spPr>
         <p:txBody>
-          <a:bodyPr wrap="none" anchor="ctr">
-            <a:spAutoFit/>
-          </a:bodyPr>
-          <a:lstStyle/>
-          <a:p>
-            <a:pPr algn="ctr"/>
-            <a:r>
-              <a:rPr sz="3400" b="1">
-                <a:solidFill>
-                  <a:srgbClr val="B5622A"/>
-                </a:solidFill>
-                <a:latin typeface="Century Gothic"/>
-              </a:rPr>
-              <a:t>WR</a:t>
-            </a:r>
-          </a:p>
-        </p:txBody>
-      </p:sp>
-      <p:sp>
-        <p:nvSpPr>
-          <p:cNvPr id="6" name="TextBox 5"/>
-          <p:cNvSpPr txBox="1"/>
-          <p:nvPr/>
-        </p:nvSpPr>
-        <p:spPr>
-          <a:xfrm>
-            <a:off x="914400" y="1874519"/>
-            <a:ext cx="10332720" cy="1554480"/>
-          </a:xfrm>
-          <a:prstGeom prst="rect">
-            <a:avLst/>
-          </a:prstGeom>
-          <a:noFill/>
-        </p:spPr>
-        <p:txBody>
           <a:bodyPr wrap="square" anchor="ctr">
             <a:spAutoFit/>
           </a:bodyPr>
@@ -3297,7 +3218,7 @@
       </p:sp>
       <p:sp>
         <p:nvSpPr>
-          <p:cNvPr id="7" name="TextBox 6"/>
+          <p:cNvPr id="5" name="TextBox 4"/>
           <p:cNvSpPr txBox="1"/>
           <p:nvPr/>
         </p:nvSpPr>
@@ -3332,7 +3253,7 @@
       </p:sp>
       <p:sp>
         <p:nvSpPr>
-          <p:cNvPr id="8" name="TextBox 7"/>
+          <p:cNvPr id="6" name="TextBox 5"/>
           <p:cNvSpPr txBox="1"/>
           <p:nvPr/>
         </p:nvSpPr>
